--- a/DataMining_PPT.pptx
+++ b/DataMining_PPT.pptx
@@ -128,7 +128,7 @@
           <a:p>
             <a:fld id="{0B419B0A-DB98-47ED-A0D2-B47FD394FE07}" type="datetimeFigureOut">
               <a:rPr lang="en-IN" smtClean="0"/>
-              <a:t>26-03-2026</a:t>
+              <a:t>03-04-2026</a:t>
             </a:fld>
             <a:endParaRPr lang="en-IN"/>
           </a:p>
@@ -631,7 +631,7 @@
           <a:p>
             <a:fld id="{1D8BD707-D9CF-40AE-B4C6-C98DA3205C09}" type="datetimeFigureOut">
               <a:rPr lang="en-US"/>
-              <a:t>3/26/2026</a:t>
+              <a:t>4/3/2026</a:t>
             </a:fld>
             <a:endParaRPr lang="en-US"/>
           </a:p>
@@ -808,7 +808,7 @@
           <a:p>
             <a:fld id="{1D8BD707-D9CF-40AE-B4C6-C98DA3205C09}" type="datetimeFigureOut">
               <a:rPr lang="en-US"/>
-              <a:t>3/26/2026</a:t>
+              <a:t>4/3/2026</a:t>
             </a:fld>
             <a:endParaRPr lang="en-US"/>
           </a:p>
@@ -1022,7 +1022,7 @@
           <a:p>
             <a:fld id="{1D8BD707-D9CF-40AE-B4C6-C98DA3205C09}" type="datetimeFigureOut">
               <a:rPr lang="en-US"/>
-              <a:t>3/26/2026</a:t>
+              <a:t>4/3/2026</a:t>
             </a:fld>
             <a:endParaRPr lang="en-US"/>
           </a:p>
@@ -1170,7 +1170,7 @@
           <a:p>
             <a:fld id="{1D8BD707-D9CF-40AE-B4C6-C98DA3205C09}" type="datetimeFigureOut">
               <a:rPr lang="en-US"/>
-              <a:t>3/26/2026</a:t>
+              <a:t>4/3/2026</a:t>
             </a:fld>
             <a:endParaRPr lang="en-US"/>
           </a:p>
@@ -1483,7 +1483,7 @@
           <a:p>
             <a:fld id="{1D8BD707-D9CF-40AE-B4C6-C98DA3205C09}" type="datetimeFigureOut">
               <a:rPr lang="en-US"/>
-              <a:t>3/26/2026</a:t>
+              <a:t>4/3/2026</a:t>
             </a:fld>
             <a:endParaRPr lang="en-US"/>
           </a:p>
@@ -1708,7 +1708,7 @@
           <a:p>
             <a:fld id="{1D8BD707-D9CF-40AE-B4C6-C98DA3205C09}" type="datetimeFigureOut">
               <a:rPr lang="en-US"/>
-              <a:t>3/26/2026</a:t>
+              <a:t>4/3/2026</a:t>
             </a:fld>
             <a:endParaRPr lang="en-US"/>
           </a:p>
@@ -2792,10 +2792,15 @@
                 <a:solidFill>
                   <a:schemeClr val="bg1"/>
                 </a:solidFill>
+                <a:latin typeface="Times New Roman" panose="02020603050405020304" pitchFamily="18" charset="0"/>
+                <a:cs typeface="Times New Roman" panose="02020603050405020304" pitchFamily="18" charset="0"/>
               </a:rPr>
               <a:t>CONCLUSION</a:t>
             </a:r>
-            <a:endParaRPr lang="en-IN" dirty="0"/>
+            <a:endParaRPr lang="en-IN" dirty="0">
+              <a:latin typeface="Times New Roman" panose="02020603050405020304" pitchFamily="18" charset="0"/>
+              <a:cs typeface="Times New Roman" panose="02020603050405020304" pitchFamily="18" charset="0"/>
+            </a:endParaRPr>
           </a:p>
         </p:txBody>
       </p:sp>
@@ -3909,18 +3914,26 @@
             <a:p>
               <a:pPr algn="l"/>
               <a:r>
-                <a:rPr lang="en-US" sz="2800" dirty="0"/>
-                <a:t>            </a:t>
+                <a:rPr lang="en-US" sz="2800" dirty="0">
+                  <a:latin typeface="Times New Roman" panose="02020603050405020304" pitchFamily="18" charset="0"/>
+                  <a:cs typeface="Times New Roman" panose="02020603050405020304" pitchFamily="18" charset="0"/>
+                </a:rPr>
+                <a:t>               </a:t>
               </a:r>
               <a:r>
                 <a:rPr lang="en-US" sz="2000" b="1" dirty="0">
                   <a:solidFill>
                     <a:schemeClr val="bg1"/>
                   </a:solidFill>
+                  <a:latin typeface="Times New Roman" panose="02020603050405020304" pitchFamily="18" charset="0"/>
+                  <a:cs typeface="Times New Roman" panose="02020603050405020304" pitchFamily="18" charset="0"/>
                 </a:rPr>
                 <a:t>PROJECT OVERVIEW</a:t>
               </a:r>
-              <a:endParaRPr sz="2800" b="1" dirty="0"/>
+              <a:endParaRPr sz="2800" b="1" dirty="0">
+                <a:latin typeface="Times New Roman" panose="02020603050405020304" pitchFamily="18" charset="0"/>
+                <a:cs typeface="Times New Roman" panose="02020603050405020304" pitchFamily="18" charset="0"/>
+              </a:endParaRPr>
             </a:p>
           </p:txBody>
         </p:sp>
@@ -4161,7 +4174,10 @@
             <a:p>
               <a:pPr algn="l"/>
               <a:r>
-                <a:rPr lang="en-US" sz="2800" dirty="0"/>
+                <a:rPr lang="en-US" sz="2800" dirty="0">
+                  <a:latin typeface="Times New Roman" panose="02020603050405020304" pitchFamily="18" charset="0"/>
+                  <a:cs typeface="Times New Roman" panose="02020603050405020304" pitchFamily="18" charset="0"/>
+                </a:rPr>
                 <a:t>            </a:t>
               </a:r>
               <a:r>
@@ -4169,10 +4185,15 @@
                   <a:solidFill>
                     <a:schemeClr val="bg1"/>
                   </a:solidFill>
+                  <a:latin typeface="Times New Roman" panose="02020603050405020304" pitchFamily="18" charset="0"/>
+                  <a:cs typeface="Times New Roman" panose="02020603050405020304" pitchFamily="18" charset="0"/>
                 </a:rPr>
                 <a:t>DATA SET DESCRIPTION</a:t>
               </a:r>
-              <a:endParaRPr sz="2800" b="1" dirty="0"/>
+              <a:endParaRPr sz="2800" b="1" dirty="0">
+                <a:latin typeface="Times New Roman" panose="02020603050405020304" pitchFamily="18" charset="0"/>
+                <a:cs typeface="Times New Roman" panose="02020603050405020304" pitchFamily="18" charset="0"/>
+              </a:endParaRPr>
             </a:p>
           </p:txBody>
         </p:sp>
@@ -4908,6 +4929,8 @@
                 <a:solidFill>
                   <a:schemeClr val="bg1"/>
                 </a:solidFill>
+                <a:latin typeface="Times New Roman" panose="02020603050405020304" pitchFamily="18" charset="0"/>
+                <a:cs typeface="Times New Roman" panose="02020603050405020304" pitchFamily="18" charset="0"/>
               </a:rPr>
               <a:t>DATA PREPROCESSING PIPELINE</a:t>
             </a:r>
@@ -6684,7 +6707,7 @@
         <p:spPr>
           <a:xfrm>
             <a:off x="3243405" y="395693"/>
-            <a:ext cx="3437004" cy="369332"/>
+            <a:ext cx="3518912" cy="369332"/>
           </a:xfrm>
           <a:prstGeom prst="rect">
             <a:avLst/>
@@ -6702,10 +6725,15 @@
                 <a:solidFill>
                   <a:schemeClr val="bg1"/>
                 </a:solidFill>
+                <a:latin typeface="Times New Roman" panose="02020603050405020304" pitchFamily="18" charset="0"/>
+                <a:cs typeface="Times New Roman" panose="02020603050405020304" pitchFamily="18" charset="0"/>
               </a:rPr>
               <a:t>10-FOLD CROSS VALIDATION</a:t>
             </a:r>
-            <a:endParaRPr lang="en-IN" dirty="0"/>
+            <a:endParaRPr lang="en-IN" dirty="0">
+              <a:latin typeface="Times New Roman" panose="02020603050405020304" pitchFamily="18" charset="0"/>
+              <a:cs typeface="Times New Roman" panose="02020603050405020304" pitchFamily="18" charset="0"/>
+            </a:endParaRPr>
           </a:p>
         </p:txBody>
       </p:sp>
@@ -7395,7 +7423,7 @@
         <p:spPr>
           <a:xfrm>
             <a:off x="2706718" y="364569"/>
-            <a:ext cx="4480714" cy="646331"/>
+            <a:ext cx="4576894" cy="646331"/>
           </a:xfrm>
           <a:prstGeom prst="rect">
             <a:avLst/>
@@ -7413,13 +7441,21 @@
                 <a:solidFill>
                   <a:schemeClr val="bg1"/>
                 </a:solidFill>
+                <a:latin typeface="Times New Roman" panose="02020603050405020304" pitchFamily="18" charset="0"/>
+                <a:cs typeface="Times New Roman" panose="02020603050405020304" pitchFamily="18" charset="0"/>
               </a:rPr>
               <a:t>CLUSTERING – K-MEANS ALGORITHM</a:t>
             </a:r>
-            <a:endParaRPr lang="en-IN" dirty="0"/>
-          </a:p>
-          <a:p>
-            <a:endParaRPr lang="en-IN" dirty="0"/>
+            <a:endParaRPr lang="en-IN" dirty="0">
+              <a:latin typeface="Times New Roman" panose="02020603050405020304" pitchFamily="18" charset="0"/>
+              <a:cs typeface="Times New Roman" panose="02020603050405020304" pitchFamily="18" charset="0"/>
+            </a:endParaRPr>
+          </a:p>
+          <a:p>
+            <a:endParaRPr lang="en-IN" dirty="0">
+              <a:latin typeface="Times New Roman" panose="02020603050405020304" pitchFamily="18" charset="0"/>
+              <a:cs typeface="Times New Roman" panose="02020603050405020304" pitchFamily="18" charset="0"/>
+            </a:endParaRPr>
           </a:p>
         </p:txBody>
       </p:sp>
@@ -8058,7 +8094,7 @@
         <p:spPr>
           <a:xfrm>
             <a:off x="3371801" y="347260"/>
-            <a:ext cx="3185487" cy="369332"/>
+            <a:ext cx="3217547" cy="369332"/>
           </a:xfrm>
           <a:prstGeom prst="rect">
             <a:avLst/>
@@ -8076,10 +8112,15 @@
                 <a:solidFill>
                   <a:schemeClr val="bg1"/>
                 </a:solidFill>
+                <a:latin typeface="Times New Roman" panose="02020603050405020304" pitchFamily="18" charset="0"/>
+                <a:cs typeface="Times New Roman" panose="02020603050405020304" pitchFamily="18" charset="0"/>
               </a:rPr>
               <a:t>RESULTS &amp; KEY INSIGHTS</a:t>
             </a:r>
-            <a:endParaRPr lang="en-IN" dirty="0"/>
+            <a:endParaRPr lang="en-IN" dirty="0">
+              <a:latin typeface="Times New Roman" panose="02020603050405020304" pitchFamily="18" charset="0"/>
+              <a:cs typeface="Times New Roman" panose="02020603050405020304" pitchFamily="18" charset="0"/>
+            </a:endParaRPr>
           </a:p>
         </p:txBody>
       </p:sp>
